--- a/decks/hengsheng-china-partner-2026-09-14/hengsheng-china-partner-v0.2-restraint.pptx
+++ b/decks/hengsheng-china-partner-2026-09-14/hengsheng-china-partner-v0.2-restraint.pptx
@@ -3453,7 +3453,7 @@
                 <a:ea typeface="Calibri" pitchFamily="34" charset="-122"/>
                 <a:cs typeface="Calibri" pitchFamily="34" charset="-120"/>
               </a:rPr>
-              <a:t>Irvine, CA · 2026</a:t>
+              <a:t>Los Angeles, CA · 2026</a:t>
             </a:r>
             <a:endParaRPr lang="en-US" sz="1400" dirty="0"/>
           </a:p>
@@ -19170,7 +19170,7 @@
                 <a:ea typeface="Microsoft YaHei" pitchFamily="34" charset="-122"/>
                 <a:cs typeface="Microsoft YaHei" pitchFamily="34" charset="-120"/>
               </a:rPr>
-              <a:t>总部：Irvine, CA, USA</a:t>
+              <a:t>总部：Los Angeles, CA, USA</a:t>
             </a:r>
             <a:endParaRPr lang="en-US" sz="1600" dirty="0"/>
           </a:p>
@@ -19200,17 +19200,6 @@
             <a:pPr indent="0" marL="0">
               <a:buNone/>
             </a:pPr>
-            <a:r>
-              <a:rPr lang="en-US" sz="1600" dirty="0">
-                <a:solidFill>
-                  <a:srgbClr val="0F172A"/>
-                </a:solidFill>
-                <a:latin typeface="Microsoft YaHei" pitchFamily="34" charset="0"/>
-                <a:ea typeface="Microsoft YaHei" pitchFamily="34" charset="-122"/>
-                <a:cs typeface="Microsoft YaHei" pitchFamily="34" charset="-120"/>
-              </a:rPr>
-              <a:t>CEO: Kevin Fan (范恒生)</a:t>
-            </a:r>
             <a:endParaRPr lang="en-US" sz="1600" dirty="0"/>
           </a:p>
         </p:txBody>
@@ -19239,17 +19228,6 @@
             <a:pPr indent="0" marL="0">
               <a:buNone/>
             </a:pPr>
-            <a:r>
-              <a:rPr lang="en-US" sz="1400" dirty="0">
-                <a:solidFill>
-                  <a:srgbClr val="64748B"/>
-                </a:solidFill>
-                <a:latin typeface="Calibri" pitchFamily="34" charset="0"/>
-                <a:ea typeface="Calibri" pitchFamily="34" charset="-122"/>
-                <a:cs typeface="Calibri" pitchFamily="34" charset="-120"/>
-              </a:rPr>
-              <a:t>pfa.kevinfan@gmail.com</a:t>
-            </a:r>
             <a:endParaRPr lang="en-US" sz="1400" dirty="0"/>
           </a:p>
         </p:txBody>
@@ -19500,7 +19478,7 @@
                 <a:ea typeface="Microsoft YaHei" pitchFamily="34" charset="-122"/>
                 <a:cs typeface="Microsoft YaHei" pitchFamily="34" charset="-120"/>
               </a:rPr>
-              <a:t>Hengsheng Group Inc. · Irvine, CA · 50+ 经纪人 · 8 家承运商</a:t>
+              <a:t>Hengsheng Group Inc. · Los Angeles, CA · 50+ 经纪人 · 8 家承运商</a:t>
             </a:r>
             <a:endParaRPr lang="en-US" sz="1400" dirty="0"/>
           </a:p>
